--- a/tests/corpus/pptx/generated/picture-formats.pptx
+++ b/tests/corpus/pptx/generated/picture-formats.pptx
@@ -6,6 +6,7 @@
   </p:sldMasterIdLst>
   <p:sldIdLst>
     <p:sldId id="256" r:id="rId2"/>
+    <p:sldId id="257" r:id="rId3"/>
   </p:sldIdLst>
   <p:sldSz cx="12192000" cy="6858000"/>
   <p:notesSz cx="6858000" cy="9144000"/>
@@ -129,7 +130,7 @@
           <p:cNvPr id="2" name="Titel 1">
             <a:extLst>
               <a:ext uri="{FF2B5EF4-FFF2-40B4-BE49-F238E27FC236}">
-                <a16:creationId xmlns:a16="http://schemas.microsoft.com/office/drawing/2014/main" id="{480569AF-25A1-E26F-3B77-BD6196AD728C}"/>
+                <a16:creationId xmlns:a16="http://schemas.microsoft.com/office/drawing/2014/main" id="{3AA38D05-5241-0FE8-BDB1-1B822E71067E}"/>
               </a:ext>
             </a:extLst>
           </p:cNvPr>
@@ -166,7 +167,7 @@
           <p:cNvPr id="3" name="Untertitel 2">
             <a:extLst>
               <a:ext uri="{FF2B5EF4-FFF2-40B4-BE49-F238E27FC236}">
-                <a16:creationId xmlns:a16="http://schemas.microsoft.com/office/drawing/2014/main" id="{0BEF46E7-BADE-DC9D-679F-9CDCF2018489}"/>
+                <a16:creationId xmlns:a16="http://schemas.microsoft.com/office/drawing/2014/main" id="{E7A0C363-B13F-9941-2204-A67092BA7033}"/>
               </a:ext>
             </a:extLst>
           </p:cNvPr>
@@ -236,7 +237,7 @@
           <p:cNvPr id="4" name="Datumsplatzhalter 3">
             <a:extLst>
               <a:ext uri="{FF2B5EF4-FFF2-40B4-BE49-F238E27FC236}">
-                <a16:creationId xmlns:a16="http://schemas.microsoft.com/office/drawing/2014/main" id="{7C4126B2-CB24-F6B8-DB2E-70CB3C0A7251}"/>
+                <a16:creationId xmlns:a16="http://schemas.microsoft.com/office/drawing/2014/main" id="{39E8C878-1DD8-CC62-5B23-FCBED9256B4A}"/>
               </a:ext>
             </a:extLst>
           </p:cNvPr>
@@ -252,9 +253,9 @@
           <a:bodyPr/>
           <a:lstStyle/>
           <a:p>
-            <a:fld id="{DD31E337-A1DE-437B-B86D-AF21ED8D6D10}" type="datetimeFigureOut">
+            <a:fld id="{EFDDD49D-8704-42EA-801F-5E12FBDC4E8B}" type="datetimeFigureOut">
               <a:rPr lang="de-DE" smtClean="0"/>
-              <a:t>09.10.2026</a:t>
+              <a:t>10.10.2026</a:t>
             </a:fld>
             <a:endParaRPr lang="de-DE"/>
           </a:p>
@@ -265,7 +266,7 @@
           <p:cNvPr id="5" name="Fußzeilenplatzhalter 4">
             <a:extLst>
               <a:ext uri="{FF2B5EF4-FFF2-40B4-BE49-F238E27FC236}">
-                <a16:creationId xmlns:a16="http://schemas.microsoft.com/office/drawing/2014/main" id="{67A90A16-29DC-8399-9D4A-341B757D423F}"/>
+                <a16:creationId xmlns:a16="http://schemas.microsoft.com/office/drawing/2014/main" id="{BCE2CD60-0852-6999-C7F4-EFCC4A1CCE37}"/>
               </a:ext>
             </a:extLst>
           </p:cNvPr>
@@ -290,7 +291,7 @@
           <p:cNvPr id="6" name="Foliennummernplatzhalter 5">
             <a:extLst>
               <a:ext uri="{FF2B5EF4-FFF2-40B4-BE49-F238E27FC236}">
-                <a16:creationId xmlns:a16="http://schemas.microsoft.com/office/drawing/2014/main" id="{183319B6-0D8D-EBB9-D3F3-D577276AB2C7}"/>
+                <a16:creationId xmlns:a16="http://schemas.microsoft.com/office/drawing/2014/main" id="{743C82A5-724C-D84E-7D8A-8A77F1ACFFF1}"/>
               </a:ext>
             </a:extLst>
           </p:cNvPr>
@@ -306,7 +307,7 @@
           <a:bodyPr/>
           <a:lstStyle/>
           <a:p>
-            <a:fld id="{44DD1593-1C71-4D52-B718-A1B7789A5E47}" type="slidenum">
+            <a:fld id="{5AA1CA3D-82A0-40EC-A914-BCBFDAD48921}" type="slidenum">
               <a:rPr lang="de-DE" smtClean="0"/>
               <a:t>‹Nr.›</a:t>
             </a:fld>
@@ -317,7 +318,7 @@
     </p:spTree>
     <p:extLst>
       <p:ext uri="{BB962C8B-B14F-4D97-AF65-F5344CB8AC3E}">
-        <p14:creationId xmlns:p14="http://schemas.microsoft.com/office/powerpoint/2010/main" val="616989122"/>
+        <p14:creationId xmlns:p14="http://schemas.microsoft.com/office/powerpoint/2010/main" val="1671475516"/>
       </p:ext>
     </p:extLst>
   </p:cSld>
@@ -349,7 +350,7 @@
           <p:cNvPr id="2" name="Titel 1">
             <a:extLst>
               <a:ext uri="{FF2B5EF4-FFF2-40B4-BE49-F238E27FC236}">
-                <a16:creationId xmlns:a16="http://schemas.microsoft.com/office/drawing/2014/main" id="{990BCA0F-9891-A60B-6747-38DBA4B7E898}"/>
+                <a16:creationId xmlns:a16="http://schemas.microsoft.com/office/drawing/2014/main" id="{E7F61163-9FE7-95B3-842F-851381B80674}"/>
               </a:ext>
             </a:extLst>
           </p:cNvPr>
@@ -377,7 +378,7 @@
           <p:cNvPr id="3" name="Vertikaler Textplatzhalter 2">
             <a:extLst>
               <a:ext uri="{FF2B5EF4-FFF2-40B4-BE49-F238E27FC236}">
-                <a16:creationId xmlns:a16="http://schemas.microsoft.com/office/drawing/2014/main" id="{0F0ABE58-F106-8E5E-AF8D-13830A610661}"/>
+                <a16:creationId xmlns:a16="http://schemas.microsoft.com/office/drawing/2014/main" id="{C5F6D49A-ED6D-2962-8973-3F1D5A0C726F}"/>
               </a:ext>
             </a:extLst>
           </p:cNvPr>
@@ -434,7 +435,7 @@
           <p:cNvPr id="4" name="Datumsplatzhalter 3">
             <a:extLst>
               <a:ext uri="{FF2B5EF4-FFF2-40B4-BE49-F238E27FC236}">
-                <a16:creationId xmlns:a16="http://schemas.microsoft.com/office/drawing/2014/main" id="{7FBDA9E4-E87E-5CA8-72D1-1CF8938420EE}"/>
+                <a16:creationId xmlns:a16="http://schemas.microsoft.com/office/drawing/2014/main" id="{B8ED3FCB-AAB2-02DC-A0F1-47CA19C31103}"/>
               </a:ext>
             </a:extLst>
           </p:cNvPr>
@@ -450,9 +451,9 @@
           <a:bodyPr/>
           <a:lstStyle/>
           <a:p>
-            <a:fld id="{DD31E337-A1DE-437B-B86D-AF21ED8D6D10}" type="datetimeFigureOut">
+            <a:fld id="{EFDDD49D-8704-42EA-801F-5E12FBDC4E8B}" type="datetimeFigureOut">
               <a:rPr lang="de-DE" smtClean="0"/>
-              <a:t>09.10.2026</a:t>
+              <a:t>10.10.2026</a:t>
             </a:fld>
             <a:endParaRPr lang="de-DE"/>
           </a:p>
@@ -463,7 +464,7 @@
           <p:cNvPr id="5" name="Fußzeilenplatzhalter 4">
             <a:extLst>
               <a:ext uri="{FF2B5EF4-FFF2-40B4-BE49-F238E27FC236}">
-                <a16:creationId xmlns:a16="http://schemas.microsoft.com/office/drawing/2014/main" id="{A527ED92-6BA1-235D-F91F-19D562AE4313}"/>
+                <a16:creationId xmlns:a16="http://schemas.microsoft.com/office/drawing/2014/main" id="{710186DB-6627-4A74-6A25-C18F32EF6870}"/>
               </a:ext>
             </a:extLst>
           </p:cNvPr>
@@ -488,7 +489,7 @@
           <p:cNvPr id="6" name="Foliennummernplatzhalter 5">
             <a:extLst>
               <a:ext uri="{FF2B5EF4-FFF2-40B4-BE49-F238E27FC236}">
-                <a16:creationId xmlns:a16="http://schemas.microsoft.com/office/drawing/2014/main" id="{9F9510E4-2614-9FB2-DB5F-C362EF466BF0}"/>
+                <a16:creationId xmlns:a16="http://schemas.microsoft.com/office/drawing/2014/main" id="{0CF046CA-7D2B-11E6-359C-51351C95429F}"/>
               </a:ext>
             </a:extLst>
           </p:cNvPr>
@@ -504,7 +505,7 @@
           <a:bodyPr/>
           <a:lstStyle/>
           <a:p>
-            <a:fld id="{44DD1593-1C71-4D52-B718-A1B7789A5E47}" type="slidenum">
+            <a:fld id="{5AA1CA3D-82A0-40EC-A914-BCBFDAD48921}" type="slidenum">
               <a:rPr lang="de-DE" smtClean="0"/>
               <a:t>‹Nr.›</a:t>
             </a:fld>
@@ -515,7 +516,7 @@
     </p:spTree>
     <p:extLst>
       <p:ext uri="{BB962C8B-B14F-4D97-AF65-F5344CB8AC3E}">
-        <p14:creationId xmlns:p14="http://schemas.microsoft.com/office/powerpoint/2010/main" val="1023326565"/>
+        <p14:creationId xmlns:p14="http://schemas.microsoft.com/office/powerpoint/2010/main" val="3417368760"/>
       </p:ext>
     </p:extLst>
   </p:cSld>
@@ -547,7 +548,7 @@
           <p:cNvPr id="2" name="Vertikaler Titel 1">
             <a:extLst>
               <a:ext uri="{FF2B5EF4-FFF2-40B4-BE49-F238E27FC236}">
-                <a16:creationId xmlns:a16="http://schemas.microsoft.com/office/drawing/2014/main" id="{7A4A8374-F330-E54B-0B7C-B48D239691DE}"/>
+                <a16:creationId xmlns:a16="http://schemas.microsoft.com/office/drawing/2014/main" id="{2F5EBF4F-8FBC-B10F-D8FD-2940DE514690}"/>
               </a:ext>
             </a:extLst>
           </p:cNvPr>
@@ -580,7 +581,7 @@
           <p:cNvPr id="3" name="Vertikaler Textplatzhalter 2">
             <a:extLst>
               <a:ext uri="{FF2B5EF4-FFF2-40B4-BE49-F238E27FC236}">
-                <a16:creationId xmlns:a16="http://schemas.microsoft.com/office/drawing/2014/main" id="{E0ECC2B3-EA8A-77C1-644A-8B370BC1DA86}"/>
+                <a16:creationId xmlns:a16="http://schemas.microsoft.com/office/drawing/2014/main" id="{83AA7DB3-B32E-A9D8-8BC1-7B8DDFD26F04}"/>
               </a:ext>
             </a:extLst>
           </p:cNvPr>
@@ -642,7 +643,7 @@
           <p:cNvPr id="4" name="Datumsplatzhalter 3">
             <a:extLst>
               <a:ext uri="{FF2B5EF4-FFF2-40B4-BE49-F238E27FC236}">
-                <a16:creationId xmlns:a16="http://schemas.microsoft.com/office/drawing/2014/main" id="{429CADBD-3342-4CF6-4D8D-173B462DDE8D}"/>
+                <a16:creationId xmlns:a16="http://schemas.microsoft.com/office/drawing/2014/main" id="{D31F894E-98E2-9961-2BCD-45262B1B83AE}"/>
               </a:ext>
             </a:extLst>
           </p:cNvPr>
@@ -658,9 +659,9 @@
           <a:bodyPr/>
           <a:lstStyle/>
           <a:p>
-            <a:fld id="{DD31E337-A1DE-437B-B86D-AF21ED8D6D10}" type="datetimeFigureOut">
+            <a:fld id="{EFDDD49D-8704-42EA-801F-5E12FBDC4E8B}" type="datetimeFigureOut">
               <a:rPr lang="de-DE" smtClean="0"/>
-              <a:t>09.10.2026</a:t>
+              <a:t>10.10.2026</a:t>
             </a:fld>
             <a:endParaRPr lang="de-DE"/>
           </a:p>
@@ -671,7 +672,7 @@
           <p:cNvPr id="5" name="Fußzeilenplatzhalter 4">
             <a:extLst>
               <a:ext uri="{FF2B5EF4-FFF2-40B4-BE49-F238E27FC236}">
-                <a16:creationId xmlns:a16="http://schemas.microsoft.com/office/drawing/2014/main" id="{C217E647-CA56-4D7B-F09B-1D837B28D7B6}"/>
+                <a16:creationId xmlns:a16="http://schemas.microsoft.com/office/drawing/2014/main" id="{8E7325FD-451E-3CD9-F278-3DB8CA55C79C}"/>
               </a:ext>
             </a:extLst>
           </p:cNvPr>
@@ -696,7 +697,7 @@
           <p:cNvPr id="6" name="Foliennummernplatzhalter 5">
             <a:extLst>
               <a:ext uri="{FF2B5EF4-FFF2-40B4-BE49-F238E27FC236}">
-                <a16:creationId xmlns:a16="http://schemas.microsoft.com/office/drawing/2014/main" id="{F5187AAA-54CA-2EE4-6713-98C59AF27442}"/>
+                <a16:creationId xmlns:a16="http://schemas.microsoft.com/office/drawing/2014/main" id="{C97FBE56-8805-C0CA-9B06-FBAEB92AD6FB}"/>
               </a:ext>
             </a:extLst>
           </p:cNvPr>
@@ -712,7 +713,7 @@
           <a:bodyPr/>
           <a:lstStyle/>
           <a:p>
-            <a:fld id="{44DD1593-1C71-4D52-B718-A1B7789A5E47}" type="slidenum">
+            <a:fld id="{5AA1CA3D-82A0-40EC-A914-BCBFDAD48921}" type="slidenum">
               <a:rPr lang="de-DE" smtClean="0"/>
               <a:t>‹Nr.›</a:t>
             </a:fld>
@@ -723,7 +724,7 @@
     </p:spTree>
     <p:extLst>
       <p:ext uri="{BB962C8B-B14F-4D97-AF65-F5344CB8AC3E}">
-        <p14:creationId xmlns:p14="http://schemas.microsoft.com/office/powerpoint/2010/main" val="2541410371"/>
+        <p14:creationId xmlns:p14="http://schemas.microsoft.com/office/powerpoint/2010/main" val="3873839331"/>
       </p:ext>
     </p:extLst>
   </p:cSld>
@@ -755,7 +756,7 @@
           <p:cNvPr id="2" name="Titel 1">
             <a:extLst>
               <a:ext uri="{FF2B5EF4-FFF2-40B4-BE49-F238E27FC236}">
-                <a16:creationId xmlns:a16="http://schemas.microsoft.com/office/drawing/2014/main" id="{4FAC8960-7F98-B11B-6A7F-82D201D85A5C}"/>
+                <a16:creationId xmlns:a16="http://schemas.microsoft.com/office/drawing/2014/main" id="{51D4EC24-D6BA-B858-38CA-5B93BBA69503}"/>
               </a:ext>
             </a:extLst>
           </p:cNvPr>
@@ -783,7 +784,7 @@
           <p:cNvPr id="3" name="Inhaltsplatzhalter 2">
             <a:extLst>
               <a:ext uri="{FF2B5EF4-FFF2-40B4-BE49-F238E27FC236}">
-                <a16:creationId xmlns:a16="http://schemas.microsoft.com/office/drawing/2014/main" id="{CA1AFCE4-FCCC-425A-CAEC-79A4F38D6BEC}"/>
+                <a16:creationId xmlns:a16="http://schemas.microsoft.com/office/drawing/2014/main" id="{E623844F-BE61-8BF7-83F1-8A27B5C34F77}"/>
               </a:ext>
             </a:extLst>
           </p:cNvPr>
@@ -840,7 +841,7 @@
           <p:cNvPr id="4" name="Datumsplatzhalter 3">
             <a:extLst>
               <a:ext uri="{FF2B5EF4-FFF2-40B4-BE49-F238E27FC236}">
-                <a16:creationId xmlns:a16="http://schemas.microsoft.com/office/drawing/2014/main" id="{DC9ED29E-F3EB-B45F-D103-01B21E8ABBCD}"/>
+                <a16:creationId xmlns:a16="http://schemas.microsoft.com/office/drawing/2014/main" id="{389FC91A-8F62-A211-74F7-3A374163363B}"/>
               </a:ext>
             </a:extLst>
           </p:cNvPr>
@@ -856,9 +857,9 @@
           <a:bodyPr/>
           <a:lstStyle/>
           <a:p>
-            <a:fld id="{DD31E337-A1DE-437B-B86D-AF21ED8D6D10}" type="datetimeFigureOut">
+            <a:fld id="{EFDDD49D-8704-42EA-801F-5E12FBDC4E8B}" type="datetimeFigureOut">
               <a:rPr lang="de-DE" smtClean="0"/>
-              <a:t>09.10.2026</a:t>
+              <a:t>10.10.2026</a:t>
             </a:fld>
             <a:endParaRPr lang="de-DE"/>
           </a:p>
@@ -869,7 +870,7 @@
           <p:cNvPr id="5" name="Fußzeilenplatzhalter 4">
             <a:extLst>
               <a:ext uri="{FF2B5EF4-FFF2-40B4-BE49-F238E27FC236}">
-                <a16:creationId xmlns:a16="http://schemas.microsoft.com/office/drawing/2014/main" id="{CD1B1AFC-4D5F-2186-180B-77C1314941DE}"/>
+                <a16:creationId xmlns:a16="http://schemas.microsoft.com/office/drawing/2014/main" id="{75894806-3A29-79EA-2346-7CDE2A53BF67}"/>
               </a:ext>
             </a:extLst>
           </p:cNvPr>
@@ -894,7 +895,7 @@
           <p:cNvPr id="6" name="Foliennummernplatzhalter 5">
             <a:extLst>
               <a:ext uri="{FF2B5EF4-FFF2-40B4-BE49-F238E27FC236}">
-                <a16:creationId xmlns:a16="http://schemas.microsoft.com/office/drawing/2014/main" id="{99644124-E82B-5A4F-23A0-10E199063DBE}"/>
+                <a16:creationId xmlns:a16="http://schemas.microsoft.com/office/drawing/2014/main" id="{C0A06B6B-B262-B8C4-3FCB-588406E9E0D0}"/>
               </a:ext>
             </a:extLst>
           </p:cNvPr>
@@ -910,7 +911,7 @@
           <a:bodyPr/>
           <a:lstStyle/>
           <a:p>
-            <a:fld id="{44DD1593-1C71-4D52-B718-A1B7789A5E47}" type="slidenum">
+            <a:fld id="{5AA1CA3D-82A0-40EC-A914-BCBFDAD48921}" type="slidenum">
               <a:rPr lang="de-DE" smtClean="0"/>
               <a:t>‹Nr.›</a:t>
             </a:fld>
@@ -921,7 +922,7 @@
     </p:spTree>
     <p:extLst>
       <p:ext uri="{BB962C8B-B14F-4D97-AF65-F5344CB8AC3E}">
-        <p14:creationId xmlns:p14="http://schemas.microsoft.com/office/powerpoint/2010/main" val="728643838"/>
+        <p14:creationId xmlns:p14="http://schemas.microsoft.com/office/powerpoint/2010/main" val="1175517133"/>
       </p:ext>
     </p:extLst>
   </p:cSld>
@@ -953,7 +954,7 @@
           <p:cNvPr id="2" name="Titel 1">
             <a:extLst>
               <a:ext uri="{FF2B5EF4-FFF2-40B4-BE49-F238E27FC236}">
-                <a16:creationId xmlns:a16="http://schemas.microsoft.com/office/drawing/2014/main" id="{50972EAF-6DFD-C89E-68C9-0D62F8B17C73}"/>
+                <a16:creationId xmlns:a16="http://schemas.microsoft.com/office/drawing/2014/main" id="{291314E4-D9A0-3030-979E-7DE74E1550C9}"/>
               </a:ext>
             </a:extLst>
           </p:cNvPr>
@@ -990,7 +991,7 @@
           <p:cNvPr id="3" name="Textplatzhalter 2">
             <a:extLst>
               <a:ext uri="{FF2B5EF4-FFF2-40B4-BE49-F238E27FC236}">
-                <a16:creationId xmlns:a16="http://schemas.microsoft.com/office/drawing/2014/main" id="{776BCA57-7BC7-2452-F5A4-0A3F3A90631A}"/>
+                <a16:creationId xmlns:a16="http://schemas.microsoft.com/office/drawing/2014/main" id="{F03E240D-3C51-6152-F624-5E7C4FBAAD7F}"/>
               </a:ext>
             </a:extLst>
           </p:cNvPr>
@@ -1115,7 +1116,7 @@
           <p:cNvPr id="4" name="Datumsplatzhalter 3">
             <a:extLst>
               <a:ext uri="{FF2B5EF4-FFF2-40B4-BE49-F238E27FC236}">
-                <a16:creationId xmlns:a16="http://schemas.microsoft.com/office/drawing/2014/main" id="{7F08B8C8-838E-88F6-2DE0-06341152AF53}"/>
+                <a16:creationId xmlns:a16="http://schemas.microsoft.com/office/drawing/2014/main" id="{133A9738-ABDF-D23A-ADE9-33A6D25B44C5}"/>
               </a:ext>
             </a:extLst>
           </p:cNvPr>
@@ -1131,9 +1132,9 @@
           <a:bodyPr/>
           <a:lstStyle/>
           <a:p>
-            <a:fld id="{DD31E337-A1DE-437B-B86D-AF21ED8D6D10}" type="datetimeFigureOut">
+            <a:fld id="{EFDDD49D-8704-42EA-801F-5E12FBDC4E8B}" type="datetimeFigureOut">
               <a:rPr lang="de-DE" smtClean="0"/>
-              <a:t>09.10.2026</a:t>
+              <a:t>10.10.2026</a:t>
             </a:fld>
             <a:endParaRPr lang="de-DE"/>
           </a:p>
@@ -1144,7 +1145,7 @@
           <p:cNvPr id="5" name="Fußzeilenplatzhalter 4">
             <a:extLst>
               <a:ext uri="{FF2B5EF4-FFF2-40B4-BE49-F238E27FC236}">
-                <a16:creationId xmlns:a16="http://schemas.microsoft.com/office/drawing/2014/main" id="{3E1EC194-CB4B-DAEF-815F-48B34DFCE1B2}"/>
+                <a16:creationId xmlns:a16="http://schemas.microsoft.com/office/drawing/2014/main" id="{8191D7E9-D279-1184-A84A-2A7B1E3BB2C8}"/>
               </a:ext>
             </a:extLst>
           </p:cNvPr>
@@ -1169,7 +1170,7 @@
           <p:cNvPr id="6" name="Foliennummernplatzhalter 5">
             <a:extLst>
               <a:ext uri="{FF2B5EF4-FFF2-40B4-BE49-F238E27FC236}">
-                <a16:creationId xmlns:a16="http://schemas.microsoft.com/office/drawing/2014/main" id="{81DC756D-49C0-4F0C-6475-57B7655E0B35}"/>
+                <a16:creationId xmlns:a16="http://schemas.microsoft.com/office/drawing/2014/main" id="{2B92060B-6CF9-4680-44F4-0AAD934A38B5}"/>
               </a:ext>
             </a:extLst>
           </p:cNvPr>
@@ -1185,7 +1186,7 @@
           <a:bodyPr/>
           <a:lstStyle/>
           <a:p>
-            <a:fld id="{44DD1593-1C71-4D52-B718-A1B7789A5E47}" type="slidenum">
+            <a:fld id="{5AA1CA3D-82A0-40EC-A914-BCBFDAD48921}" type="slidenum">
               <a:rPr lang="de-DE" smtClean="0"/>
               <a:t>‹Nr.›</a:t>
             </a:fld>
@@ -1196,7 +1197,7 @@
     </p:spTree>
     <p:extLst>
       <p:ext uri="{BB962C8B-B14F-4D97-AF65-F5344CB8AC3E}">
-        <p14:creationId xmlns:p14="http://schemas.microsoft.com/office/powerpoint/2010/main" val="87955801"/>
+        <p14:creationId xmlns:p14="http://schemas.microsoft.com/office/powerpoint/2010/main" val="2042337470"/>
       </p:ext>
     </p:extLst>
   </p:cSld>
@@ -1228,7 +1229,7 @@
           <p:cNvPr id="2" name="Titel 1">
             <a:extLst>
               <a:ext uri="{FF2B5EF4-FFF2-40B4-BE49-F238E27FC236}">
-                <a16:creationId xmlns:a16="http://schemas.microsoft.com/office/drawing/2014/main" id="{E9E970B3-CECF-EEA0-6C45-13690ABBF85E}"/>
+                <a16:creationId xmlns:a16="http://schemas.microsoft.com/office/drawing/2014/main" id="{35E26057-A692-6F8C-6070-20A419DC36DE}"/>
               </a:ext>
             </a:extLst>
           </p:cNvPr>
@@ -1256,7 +1257,7 @@
           <p:cNvPr id="3" name="Inhaltsplatzhalter 2">
             <a:extLst>
               <a:ext uri="{FF2B5EF4-FFF2-40B4-BE49-F238E27FC236}">
-                <a16:creationId xmlns:a16="http://schemas.microsoft.com/office/drawing/2014/main" id="{5F5AE239-6B14-CC1E-710D-F5D79F488E83}"/>
+                <a16:creationId xmlns:a16="http://schemas.microsoft.com/office/drawing/2014/main" id="{BB69D0DD-2804-BCD4-D40B-BA94E1B00F80}"/>
               </a:ext>
             </a:extLst>
           </p:cNvPr>
@@ -1318,7 +1319,7 @@
           <p:cNvPr id="4" name="Inhaltsplatzhalter 3">
             <a:extLst>
               <a:ext uri="{FF2B5EF4-FFF2-40B4-BE49-F238E27FC236}">
-                <a16:creationId xmlns:a16="http://schemas.microsoft.com/office/drawing/2014/main" id="{A7136DDF-AB48-F00A-D3F9-A59646CB620D}"/>
+                <a16:creationId xmlns:a16="http://schemas.microsoft.com/office/drawing/2014/main" id="{A560EBF3-91F5-2826-5759-EF9A346C2575}"/>
               </a:ext>
             </a:extLst>
           </p:cNvPr>
@@ -1380,7 +1381,7 @@
           <p:cNvPr id="5" name="Datumsplatzhalter 4">
             <a:extLst>
               <a:ext uri="{FF2B5EF4-FFF2-40B4-BE49-F238E27FC236}">
-                <a16:creationId xmlns:a16="http://schemas.microsoft.com/office/drawing/2014/main" id="{E8CFC387-89E3-866F-3DC3-CED7882FEF87}"/>
+                <a16:creationId xmlns:a16="http://schemas.microsoft.com/office/drawing/2014/main" id="{5CB6F7F6-2B10-11F5-97D8-5690A541E1D5}"/>
               </a:ext>
             </a:extLst>
           </p:cNvPr>
@@ -1396,9 +1397,9 @@
           <a:bodyPr/>
           <a:lstStyle/>
           <a:p>
-            <a:fld id="{DD31E337-A1DE-437B-B86D-AF21ED8D6D10}" type="datetimeFigureOut">
+            <a:fld id="{EFDDD49D-8704-42EA-801F-5E12FBDC4E8B}" type="datetimeFigureOut">
               <a:rPr lang="de-DE" smtClean="0"/>
-              <a:t>09.10.2026</a:t>
+              <a:t>10.10.2026</a:t>
             </a:fld>
             <a:endParaRPr lang="de-DE"/>
           </a:p>
@@ -1409,7 +1410,7 @@
           <p:cNvPr id="6" name="Fußzeilenplatzhalter 5">
             <a:extLst>
               <a:ext uri="{FF2B5EF4-FFF2-40B4-BE49-F238E27FC236}">
-                <a16:creationId xmlns:a16="http://schemas.microsoft.com/office/drawing/2014/main" id="{0683E293-CD41-C4B9-F9D2-87652526F670}"/>
+                <a16:creationId xmlns:a16="http://schemas.microsoft.com/office/drawing/2014/main" id="{25E56386-471A-57B5-0C95-89DC1910591B}"/>
               </a:ext>
             </a:extLst>
           </p:cNvPr>
@@ -1434,7 +1435,7 @@
           <p:cNvPr id="7" name="Foliennummernplatzhalter 6">
             <a:extLst>
               <a:ext uri="{FF2B5EF4-FFF2-40B4-BE49-F238E27FC236}">
-                <a16:creationId xmlns:a16="http://schemas.microsoft.com/office/drawing/2014/main" id="{8800088B-7463-181C-3F91-82C7FAA92CF8}"/>
+                <a16:creationId xmlns:a16="http://schemas.microsoft.com/office/drawing/2014/main" id="{B4D371CC-28EC-8999-6849-06AC73003DE6}"/>
               </a:ext>
             </a:extLst>
           </p:cNvPr>
@@ -1450,7 +1451,7 @@
           <a:bodyPr/>
           <a:lstStyle/>
           <a:p>
-            <a:fld id="{44DD1593-1C71-4D52-B718-A1B7789A5E47}" type="slidenum">
+            <a:fld id="{5AA1CA3D-82A0-40EC-A914-BCBFDAD48921}" type="slidenum">
               <a:rPr lang="de-DE" smtClean="0"/>
               <a:t>‹Nr.›</a:t>
             </a:fld>
@@ -1461,7 +1462,7 @@
     </p:spTree>
     <p:extLst>
       <p:ext uri="{BB962C8B-B14F-4D97-AF65-F5344CB8AC3E}">
-        <p14:creationId xmlns:p14="http://schemas.microsoft.com/office/powerpoint/2010/main" val="1185371448"/>
+        <p14:creationId xmlns:p14="http://schemas.microsoft.com/office/powerpoint/2010/main" val="2215998966"/>
       </p:ext>
     </p:extLst>
   </p:cSld>
@@ -1493,7 +1494,7 @@
           <p:cNvPr id="2" name="Titel 1">
             <a:extLst>
               <a:ext uri="{FF2B5EF4-FFF2-40B4-BE49-F238E27FC236}">
-                <a16:creationId xmlns:a16="http://schemas.microsoft.com/office/drawing/2014/main" id="{76FFCC0F-5865-54B5-0C0F-3BD67A1180B5}"/>
+                <a16:creationId xmlns:a16="http://schemas.microsoft.com/office/drawing/2014/main" id="{3DE51F4C-94D1-3656-557C-39011B06F21C}"/>
               </a:ext>
             </a:extLst>
           </p:cNvPr>
@@ -1526,7 +1527,7 @@
           <p:cNvPr id="3" name="Textplatzhalter 2">
             <a:extLst>
               <a:ext uri="{FF2B5EF4-FFF2-40B4-BE49-F238E27FC236}">
-                <a16:creationId xmlns:a16="http://schemas.microsoft.com/office/drawing/2014/main" id="{DB85246D-CCB7-6C48-F840-2E0611A6AB90}"/>
+                <a16:creationId xmlns:a16="http://schemas.microsoft.com/office/drawing/2014/main" id="{00011B9F-611A-6396-2643-BD12DCD8431B}"/>
               </a:ext>
             </a:extLst>
           </p:cNvPr>
@@ -1597,7 +1598,7 @@
           <p:cNvPr id="4" name="Inhaltsplatzhalter 3">
             <a:extLst>
               <a:ext uri="{FF2B5EF4-FFF2-40B4-BE49-F238E27FC236}">
-                <a16:creationId xmlns:a16="http://schemas.microsoft.com/office/drawing/2014/main" id="{1CA373D2-DEB9-DB37-D26F-B641C5E5505C}"/>
+                <a16:creationId xmlns:a16="http://schemas.microsoft.com/office/drawing/2014/main" id="{DE6DA20A-8D1D-08D2-A908-A98005ED2DC7}"/>
               </a:ext>
             </a:extLst>
           </p:cNvPr>
@@ -1659,7 +1660,7 @@
           <p:cNvPr id="5" name="Textplatzhalter 4">
             <a:extLst>
               <a:ext uri="{FF2B5EF4-FFF2-40B4-BE49-F238E27FC236}">
-                <a16:creationId xmlns:a16="http://schemas.microsoft.com/office/drawing/2014/main" id="{7A2984AA-5042-B3C5-4D34-1A0B714A711E}"/>
+                <a16:creationId xmlns:a16="http://schemas.microsoft.com/office/drawing/2014/main" id="{14B48C0B-CA4F-C019-8448-C2B3DFA4C790}"/>
               </a:ext>
             </a:extLst>
           </p:cNvPr>
@@ -1730,7 +1731,7 @@
           <p:cNvPr id="6" name="Inhaltsplatzhalter 5">
             <a:extLst>
               <a:ext uri="{FF2B5EF4-FFF2-40B4-BE49-F238E27FC236}">
-                <a16:creationId xmlns:a16="http://schemas.microsoft.com/office/drawing/2014/main" id="{8B07D048-95AC-965E-EF29-F7896A4EFC9A}"/>
+                <a16:creationId xmlns:a16="http://schemas.microsoft.com/office/drawing/2014/main" id="{272A1A88-F525-2C5A-3ED6-F89EB5E13F91}"/>
               </a:ext>
             </a:extLst>
           </p:cNvPr>
@@ -1792,7 +1793,7 @@
           <p:cNvPr id="7" name="Datumsplatzhalter 6">
             <a:extLst>
               <a:ext uri="{FF2B5EF4-FFF2-40B4-BE49-F238E27FC236}">
-                <a16:creationId xmlns:a16="http://schemas.microsoft.com/office/drawing/2014/main" id="{F64F64A7-5BD0-65D4-1381-4C2D767D5FC2}"/>
+                <a16:creationId xmlns:a16="http://schemas.microsoft.com/office/drawing/2014/main" id="{F8712363-66E2-8C6F-959F-B007D4F56DC0}"/>
               </a:ext>
             </a:extLst>
           </p:cNvPr>
@@ -1808,9 +1809,9 @@
           <a:bodyPr/>
           <a:lstStyle/>
           <a:p>
-            <a:fld id="{DD31E337-A1DE-437B-B86D-AF21ED8D6D10}" type="datetimeFigureOut">
+            <a:fld id="{EFDDD49D-8704-42EA-801F-5E12FBDC4E8B}" type="datetimeFigureOut">
               <a:rPr lang="de-DE" smtClean="0"/>
-              <a:t>09.10.2026</a:t>
+              <a:t>10.10.2026</a:t>
             </a:fld>
             <a:endParaRPr lang="de-DE"/>
           </a:p>
@@ -1821,7 +1822,7 @@
           <p:cNvPr id="8" name="Fußzeilenplatzhalter 7">
             <a:extLst>
               <a:ext uri="{FF2B5EF4-FFF2-40B4-BE49-F238E27FC236}">
-                <a16:creationId xmlns:a16="http://schemas.microsoft.com/office/drawing/2014/main" id="{3DE4C7D2-63DE-8363-56C4-C95A8D4C131E}"/>
+                <a16:creationId xmlns:a16="http://schemas.microsoft.com/office/drawing/2014/main" id="{A7FE55C7-D65F-5E0B-A13A-37E34AA4581D}"/>
               </a:ext>
             </a:extLst>
           </p:cNvPr>
@@ -1846,7 +1847,7 @@
           <p:cNvPr id="9" name="Foliennummernplatzhalter 8">
             <a:extLst>
               <a:ext uri="{FF2B5EF4-FFF2-40B4-BE49-F238E27FC236}">
-                <a16:creationId xmlns:a16="http://schemas.microsoft.com/office/drawing/2014/main" id="{185F4191-0AE2-A0A3-2FD6-25E261722A9C}"/>
+                <a16:creationId xmlns:a16="http://schemas.microsoft.com/office/drawing/2014/main" id="{666E2547-C805-BC3F-1B7A-065F23A36EEB}"/>
               </a:ext>
             </a:extLst>
           </p:cNvPr>
@@ -1862,7 +1863,7 @@
           <a:bodyPr/>
           <a:lstStyle/>
           <a:p>
-            <a:fld id="{44DD1593-1C71-4D52-B718-A1B7789A5E47}" type="slidenum">
+            <a:fld id="{5AA1CA3D-82A0-40EC-A914-BCBFDAD48921}" type="slidenum">
               <a:rPr lang="de-DE" smtClean="0"/>
               <a:t>‹Nr.›</a:t>
             </a:fld>
@@ -1873,7 +1874,7 @@
     </p:spTree>
     <p:extLst>
       <p:ext uri="{BB962C8B-B14F-4D97-AF65-F5344CB8AC3E}">
-        <p14:creationId xmlns:p14="http://schemas.microsoft.com/office/powerpoint/2010/main" val="2422205252"/>
+        <p14:creationId xmlns:p14="http://schemas.microsoft.com/office/powerpoint/2010/main" val="88656182"/>
       </p:ext>
     </p:extLst>
   </p:cSld>
@@ -1905,7 +1906,7 @@
           <p:cNvPr id="2" name="Titel 1">
             <a:extLst>
               <a:ext uri="{FF2B5EF4-FFF2-40B4-BE49-F238E27FC236}">
-                <a16:creationId xmlns:a16="http://schemas.microsoft.com/office/drawing/2014/main" id="{7B7D654E-8740-7C10-2566-720EEADCE975}"/>
+                <a16:creationId xmlns:a16="http://schemas.microsoft.com/office/drawing/2014/main" id="{52DA2BFA-EC1C-6A92-0B89-C9EA15F7B650}"/>
               </a:ext>
             </a:extLst>
           </p:cNvPr>
@@ -1933,7 +1934,7 @@
           <p:cNvPr id="3" name="Datumsplatzhalter 2">
             <a:extLst>
               <a:ext uri="{FF2B5EF4-FFF2-40B4-BE49-F238E27FC236}">
-                <a16:creationId xmlns:a16="http://schemas.microsoft.com/office/drawing/2014/main" id="{D9018A9E-0AC0-F271-BA50-E09C2C3B21B4}"/>
+                <a16:creationId xmlns:a16="http://schemas.microsoft.com/office/drawing/2014/main" id="{EF3E57B5-CBD1-DE26-F613-4A16DC9F978B}"/>
               </a:ext>
             </a:extLst>
           </p:cNvPr>
@@ -1949,9 +1950,9 @@
           <a:bodyPr/>
           <a:lstStyle/>
           <a:p>
-            <a:fld id="{DD31E337-A1DE-437B-B86D-AF21ED8D6D10}" type="datetimeFigureOut">
+            <a:fld id="{EFDDD49D-8704-42EA-801F-5E12FBDC4E8B}" type="datetimeFigureOut">
               <a:rPr lang="de-DE" smtClean="0"/>
-              <a:t>09.10.2026</a:t>
+              <a:t>10.10.2026</a:t>
             </a:fld>
             <a:endParaRPr lang="de-DE"/>
           </a:p>
@@ -1962,7 +1963,7 @@
           <p:cNvPr id="4" name="Fußzeilenplatzhalter 3">
             <a:extLst>
               <a:ext uri="{FF2B5EF4-FFF2-40B4-BE49-F238E27FC236}">
-                <a16:creationId xmlns:a16="http://schemas.microsoft.com/office/drawing/2014/main" id="{B8BD6D0D-567E-D3ED-DF48-59007FE4451A}"/>
+                <a16:creationId xmlns:a16="http://schemas.microsoft.com/office/drawing/2014/main" id="{B8743B1E-6E6D-8F0E-DB2F-41349607214F}"/>
               </a:ext>
             </a:extLst>
           </p:cNvPr>
@@ -1987,7 +1988,7 @@
           <p:cNvPr id="5" name="Foliennummernplatzhalter 4">
             <a:extLst>
               <a:ext uri="{FF2B5EF4-FFF2-40B4-BE49-F238E27FC236}">
-                <a16:creationId xmlns:a16="http://schemas.microsoft.com/office/drawing/2014/main" id="{2EEFFEDE-81C4-CE38-5486-375FEC18CB4D}"/>
+                <a16:creationId xmlns:a16="http://schemas.microsoft.com/office/drawing/2014/main" id="{F0AEBF8A-022A-5972-6822-F29F74B3BA86}"/>
               </a:ext>
             </a:extLst>
           </p:cNvPr>
@@ -2003,7 +2004,7 @@
           <a:bodyPr/>
           <a:lstStyle/>
           <a:p>
-            <a:fld id="{44DD1593-1C71-4D52-B718-A1B7789A5E47}" type="slidenum">
+            <a:fld id="{5AA1CA3D-82A0-40EC-A914-BCBFDAD48921}" type="slidenum">
               <a:rPr lang="de-DE" smtClean="0"/>
               <a:t>‹Nr.›</a:t>
             </a:fld>
@@ -2014,7 +2015,7 @@
     </p:spTree>
     <p:extLst>
       <p:ext uri="{BB962C8B-B14F-4D97-AF65-F5344CB8AC3E}">
-        <p14:creationId xmlns:p14="http://schemas.microsoft.com/office/powerpoint/2010/main" val="2843246367"/>
+        <p14:creationId xmlns:p14="http://schemas.microsoft.com/office/powerpoint/2010/main" val="3159389784"/>
       </p:ext>
     </p:extLst>
   </p:cSld>
@@ -2046,7 +2047,7 @@
           <p:cNvPr id="2" name="Datumsplatzhalter 1">
             <a:extLst>
               <a:ext uri="{FF2B5EF4-FFF2-40B4-BE49-F238E27FC236}">
-                <a16:creationId xmlns:a16="http://schemas.microsoft.com/office/drawing/2014/main" id="{0596649B-3C9E-48A4-EB04-D20D47260042}"/>
+                <a16:creationId xmlns:a16="http://schemas.microsoft.com/office/drawing/2014/main" id="{1B149F4C-7E63-CBDF-5BF0-67BDAF1DEF9A}"/>
               </a:ext>
             </a:extLst>
           </p:cNvPr>
@@ -2062,9 +2063,9 @@
           <a:bodyPr/>
           <a:lstStyle/>
           <a:p>
-            <a:fld id="{DD31E337-A1DE-437B-B86D-AF21ED8D6D10}" type="datetimeFigureOut">
+            <a:fld id="{EFDDD49D-8704-42EA-801F-5E12FBDC4E8B}" type="datetimeFigureOut">
               <a:rPr lang="de-DE" smtClean="0"/>
-              <a:t>09.10.2026</a:t>
+              <a:t>10.10.2026</a:t>
             </a:fld>
             <a:endParaRPr lang="de-DE"/>
           </a:p>
@@ -2075,7 +2076,7 @@
           <p:cNvPr id="3" name="Fußzeilenplatzhalter 2">
             <a:extLst>
               <a:ext uri="{FF2B5EF4-FFF2-40B4-BE49-F238E27FC236}">
-                <a16:creationId xmlns:a16="http://schemas.microsoft.com/office/drawing/2014/main" id="{7336A6E5-CF5A-2BD1-8955-D2A396C2F280}"/>
+                <a16:creationId xmlns:a16="http://schemas.microsoft.com/office/drawing/2014/main" id="{3E2927EE-1023-C77C-59B1-E5320001A1AB}"/>
               </a:ext>
             </a:extLst>
           </p:cNvPr>
@@ -2100,7 +2101,7 @@
           <p:cNvPr id="4" name="Foliennummernplatzhalter 3">
             <a:extLst>
               <a:ext uri="{FF2B5EF4-FFF2-40B4-BE49-F238E27FC236}">
-                <a16:creationId xmlns:a16="http://schemas.microsoft.com/office/drawing/2014/main" id="{149F1585-63CB-B75A-456E-54D64A25A4B9}"/>
+                <a16:creationId xmlns:a16="http://schemas.microsoft.com/office/drawing/2014/main" id="{C7F41AC6-20A0-FCDB-4E3C-9BDD25188692}"/>
               </a:ext>
             </a:extLst>
           </p:cNvPr>
@@ -2116,7 +2117,7 @@
           <a:bodyPr/>
           <a:lstStyle/>
           <a:p>
-            <a:fld id="{44DD1593-1C71-4D52-B718-A1B7789A5E47}" type="slidenum">
+            <a:fld id="{5AA1CA3D-82A0-40EC-A914-BCBFDAD48921}" type="slidenum">
               <a:rPr lang="de-DE" smtClean="0"/>
               <a:t>‹Nr.›</a:t>
             </a:fld>
@@ -2127,7 +2128,7 @@
     </p:spTree>
     <p:extLst>
       <p:ext uri="{BB962C8B-B14F-4D97-AF65-F5344CB8AC3E}">
-        <p14:creationId xmlns:p14="http://schemas.microsoft.com/office/powerpoint/2010/main" val="3691384642"/>
+        <p14:creationId xmlns:p14="http://schemas.microsoft.com/office/powerpoint/2010/main" val="2990476531"/>
       </p:ext>
     </p:extLst>
   </p:cSld>
@@ -2159,7 +2160,7 @@
           <p:cNvPr id="2" name="Titel 1">
             <a:extLst>
               <a:ext uri="{FF2B5EF4-FFF2-40B4-BE49-F238E27FC236}">
-                <a16:creationId xmlns:a16="http://schemas.microsoft.com/office/drawing/2014/main" id="{B293772B-8726-8532-1F1B-60E27172A94D}"/>
+                <a16:creationId xmlns:a16="http://schemas.microsoft.com/office/drawing/2014/main" id="{18257BA5-E39C-357C-496D-E957ED410111}"/>
               </a:ext>
             </a:extLst>
           </p:cNvPr>
@@ -2196,7 +2197,7 @@
           <p:cNvPr id="3" name="Inhaltsplatzhalter 2">
             <a:extLst>
               <a:ext uri="{FF2B5EF4-FFF2-40B4-BE49-F238E27FC236}">
-                <a16:creationId xmlns:a16="http://schemas.microsoft.com/office/drawing/2014/main" id="{D191ACF9-8338-F475-6FE8-A0117A24315A}"/>
+                <a16:creationId xmlns:a16="http://schemas.microsoft.com/office/drawing/2014/main" id="{34EA21FA-98C6-E9E1-118E-EE73C48F03CF}"/>
               </a:ext>
             </a:extLst>
           </p:cNvPr>
@@ -2286,7 +2287,7 @@
           <p:cNvPr id="4" name="Textplatzhalter 3">
             <a:extLst>
               <a:ext uri="{FF2B5EF4-FFF2-40B4-BE49-F238E27FC236}">
-                <a16:creationId xmlns:a16="http://schemas.microsoft.com/office/drawing/2014/main" id="{BB1F4535-DD72-70B3-485B-493D776F66B9}"/>
+                <a16:creationId xmlns:a16="http://schemas.microsoft.com/office/drawing/2014/main" id="{0230FC9B-E52D-8E27-ACB8-AF54EB6EC10A}"/>
               </a:ext>
             </a:extLst>
           </p:cNvPr>
@@ -2357,7 +2358,7 @@
           <p:cNvPr id="5" name="Datumsplatzhalter 4">
             <a:extLst>
               <a:ext uri="{FF2B5EF4-FFF2-40B4-BE49-F238E27FC236}">
-                <a16:creationId xmlns:a16="http://schemas.microsoft.com/office/drawing/2014/main" id="{F915C9D9-F754-EFCD-57C6-F2C747D9329E}"/>
+                <a16:creationId xmlns:a16="http://schemas.microsoft.com/office/drawing/2014/main" id="{09461831-364B-B823-915A-AAAF6EB9F27F}"/>
               </a:ext>
             </a:extLst>
           </p:cNvPr>
@@ -2373,9 +2374,9 @@
           <a:bodyPr/>
           <a:lstStyle/>
           <a:p>
-            <a:fld id="{DD31E337-A1DE-437B-B86D-AF21ED8D6D10}" type="datetimeFigureOut">
+            <a:fld id="{EFDDD49D-8704-42EA-801F-5E12FBDC4E8B}" type="datetimeFigureOut">
               <a:rPr lang="de-DE" smtClean="0"/>
-              <a:t>09.10.2026</a:t>
+              <a:t>10.10.2026</a:t>
             </a:fld>
             <a:endParaRPr lang="de-DE"/>
           </a:p>
@@ -2386,7 +2387,7 @@
           <p:cNvPr id="6" name="Fußzeilenplatzhalter 5">
             <a:extLst>
               <a:ext uri="{FF2B5EF4-FFF2-40B4-BE49-F238E27FC236}">
-                <a16:creationId xmlns:a16="http://schemas.microsoft.com/office/drawing/2014/main" id="{D907FD68-6AEA-C3C4-65A2-9EFEAB23D1FA}"/>
+                <a16:creationId xmlns:a16="http://schemas.microsoft.com/office/drawing/2014/main" id="{AB4EFA90-8571-F672-7CE8-E652FE201D42}"/>
               </a:ext>
             </a:extLst>
           </p:cNvPr>
@@ -2411,7 +2412,7 @@
           <p:cNvPr id="7" name="Foliennummernplatzhalter 6">
             <a:extLst>
               <a:ext uri="{FF2B5EF4-FFF2-40B4-BE49-F238E27FC236}">
-                <a16:creationId xmlns:a16="http://schemas.microsoft.com/office/drawing/2014/main" id="{61A68EF5-ABFF-ECAE-66CC-7A8AAD7D184B}"/>
+                <a16:creationId xmlns:a16="http://schemas.microsoft.com/office/drawing/2014/main" id="{AC8E9519-9D33-7282-CD4C-2CD97A41070E}"/>
               </a:ext>
             </a:extLst>
           </p:cNvPr>
@@ -2427,7 +2428,7 @@
           <a:bodyPr/>
           <a:lstStyle/>
           <a:p>
-            <a:fld id="{44DD1593-1C71-4D52-B718-A1B7789A5E47}" type="slidenum">
+            <a:fld id="{5AA1CA3D-82A0-40EC-A914-BCBFDAD48921}" type="slidenum">
               <a:rPr lang="de-DE" smtClean="0"/>
               <a:t>‹Nr.›</a:t>
             </a:fld>
@@ -2438,7 +2439,7 @@
     </p:spTree>
     <p:extLst>
       <p:ext uri="{BB962C8B-B14F-4D97-AF65-F5344CB8AC3E}">
-        <p14:creationId xmlns:p14="http://schemas.microsoft.com/office/powerpoint/2010/main" val="1132558525"/>
+        <p14:creationId xmlns:p14="http://schemas.microsoft.com/office/powerpoint/2010/main" val="2427309"/>
       </p:ext>
     </p:extLst>
   </p:cSld>
@@ -2470,7 +2471,7 @@
           <p:cNvPr id="2" name="Titel 1">
             <a:extLst>
               <a:ext uri="{FF2B5EF4-FFF2-40B4-BE49-F238E27FC236}">
-                <a16:creationId xmlns:a16="http://schemas.microsoft.com/office/drawing/2014/main" id="{4C8891D8-5586-3443-E779-A140606E6D4A}"/>
+                <a16:creationId xmlns:a16="http://schemas.microsoft.com/office/drawing/2014/main" id="{AFC09733-9AE1-0484-6E8E-71F1EAB09424}"/>
               </a:ext>
             </a:extLst>
           </p:cNvPr>
@@ -2507,7 +2508,7 @@
           <p:cNvPr id="3" name="Bildplatzhalter 2">
             <a:extLst>
               <a:ext uri="{FF2B5EF4-FFF2-40B4-BE49-F238E27FC236}">
-                <a16:creationId xmlns:a16="http://schemas.microsoft.com/office/drawing/2014/main" id="{BF8C14A0-D3F5-0A8E-1628-D0818CB651D5}"/>
+                <a16:creationId xmlns:a16="http://schemas.microsoft.com/office/drawing/2014/main" id="{646D87C5-B399-3EA7-0430-EF9A0D4BF65F}"/>
               </a:ext>
             </a:extLst>
           </p:cNvPr>
@@ -2574,7 +2575,7 @@
           <p:cNvPr id="4" name="Textplatzhalter 3">
             <a:extLst>
               <a:ext uri="{FF2B5EF4-FFF2-40B4-BE49-F238E27FC236}">
-                <a16:creationId xmlns:a16="http://schemas.microsoft.com/office/drawing/2014/main" id="{219E2488-E7A2-0804-2572-6FEAAF14F4CF}"/>
+                <a16:creationId xmlns:a16="http://schemas.microsoft.com/office/drawing/2014/main" id="{5E887F04-8A91-5DE7-3A80-B6050836D724}"/>
               </a:ext>
             </a:extLst>
           </p:cNvPr>
@@ -2645,7 +2646,7 @@
           <p:cNvPr id="5" name="Datumsplatzhalter 4">
             <a:extLst>
               <a:ext uri="{FF2B5EF4-FFF2-40B4-BE49-F238E27FC236}">
-                <a16:creationId xmlns:a16="http://schemas.microsoft.com/office/drawing/2014/main" id="{2CD0FE88-5807-FD95-B85C-FA0A027CF9B2}"/>
+                <a16:creationId xmlns:a16="http://schemas.microsoft.com/office/drawing/2014/main" id="{AD6D8645-F6F5-AB87-85F0-B8075954F44E}"/>
               </a:ext>
             </a:extLst>
           </p:cNvPr>
@@ -2661,9 +2662,9 @@
           <a:bodyPr/>
           <a:lstStyle/>
           <a:p>
-            <a:fld id="{DD31E337-A1DE-437B-B86D-AF21ED8D6D10}" type="datetimeFigureOut">
+            <a:fld id="{EFDDD49D-8704-42EA-801F-5E12FBDC4E8B}" type="datetimeFigureOut">
               <a:rPr lang="de-DE" smtClean="0"/>
-              <a:t>09.10.2026</a:t>
+              <a:t>10.10.2026</a:t>
             </a:fld>
             <a:endParaRPr lang="de-DE"/>
           </a:p>
@@ -2674,7 +2675,7 @@
           <p:cNvPr id="6" name="Fußzeilenplatzhalter 5">
             <a:extLst>
               <a:ext uri="{FF2B5EF4-FFF2-40B4-BE49-F238E27FC236}">
-                <a16:creationId xmlns:a16="http://schemas.microsoft.com/office/drawing/2014/main" id="{AC0890E7-A3E6-B857-43A3-65F9169DAC89}"/>
+                <a16:creationId xmlns:a16="http://schemas.microsoft.com/office/drawing/2014/main" id="{E1949FB6-75EF-E2CB-EC29-8374D4869F52}"/>
               </a:ext>
             </a:extLst>
           </p:cNvPr>
@@ -2699,7 +2700,7 @@
           <p:cNvPr id="7" name="Foliennummernplatzhalter 6">
             <a:extLst>
               <a:ext uri="{FF2B5EF4-FFF2-40B4-BE49-F238E27FC236}">
-                <a16:creationId xmlns:a16="http://schemas.microsoft.com/office/drawing/2014/main" id="{FA0761F3-7E55-A51E-DE4A-6A689865A2FD}"/>
+                <a16:creationId xmlns:a16="http://schemas.microsoft.com/office/drawing/2014/main" id="{2EB94BEF-E8FB-8F23-195A-47D48554BF0E}"/>
               </a:ext>
             </a:extLst>
           </p:cNvPr>
@@ -2715,7 +2716,7 @@
           <a:bodyPr/>
           <a:lstStyle/>
           <a:p>
-            <a:fld id="{44DD1593-1C71-4D52-B718-A1B7789A5E47}" type="slidenum">
+            <a:fld id="{5AA1CA3D-82A0-40EC-A914-BCBFDAD48921}" type="slidenum">
               <a:rPr lang="de-DE" smtClean="0"/>
               <a:t>‹Nr.›</a:t>
             </a:fld>
@@ -2726,7 +2727,7 @@
     </p:spTree>
     <p:extLst>
       <p:ext uri="{BB962C8B-B14F-4D97-AF65-F5344CB8AC3E}">
-        <p14:creationId xmlns:p14="http://schemas.microsoft.com/office/powerpoint/2010/main" val="1175251937"/>
+        <p14:creationId xmlns:p14="http://schemas.microsoft.com/office/powerpoint/2010/main" val="2104332682"/>
       </p:ext>
     </p:extLst>
   </p:cSld>
@@ -2763,7 +2764,7 @@
           <p:cNvPr id="2" name="Titelplatzhalter 1">
             <a:extLst>
               <a:ext uri="{FF2B5EF4-FFF2-40B4-BE49-F238E27FC236}">
-                <a16:creationId xmlns:a16="http://schemas.microsoft.com/office/drawing/2014/main" id="{73DF2985-A123-5DD5-DE13-BAE10EEF7136}"/>
+                <a16:creationId xmlns:a16="http://schemas.microsoft.com/office/drawing/2014/main" id="{A247CAA8-30ED-8259-4DB9-3EB7FD17219A}"/>
               </a:ext>
             </a:extLst>
           </p:cNvPr>
@@ -2801,7 +2802,7 @@
           <p:cNvPr id="3" name="Textplatzhalter 2">
             <a:extLst>
               <a:ext uri="{FF2B5EF4-FFF2-40B4-BE49-F238E27FC236}">
-                <a16:creationId xmlns:a16="http://schemas.microsoft.com/office/drawing/2014/main" id="{B3602E13-5C87-9569-6F06-ECF53BF8F097}"/>
+                <a16:creationId xmlns:a16="http://schemas.microsoft.com/office/drawing/2014/main" id="{AD237F5B-6AE8-0BBD-E8CF-AAD39FBC091D}"/>
               </a:ext>
             </a:extLst>
           </p:cNvPr>
@@ -2868,7 +2869,7 @@
           <p:cNvPr id="4" name="Datumsplatzhalter 3">
             <a:extLst>
               <a:ext uri="{FF2B5EF4-FFF2-40B4-BE49-F238E27FC236}">
-                <a16:creationId xmlns:a16="http://schemas.microsoft.com/office/drawing/2014/main" id="{A03A5A22-1BBF-B3E7-D92D-2E39074E807D}"/>
+                <a16:creationId xmlns:a16="http://schemas.microsoft.com/office/drawing/2014/main" id="{957FE0A5-8AC4-B89B-1350-0A1CC708365B}"/>
               </a:ext>
             </a:extLst>
           </p:cNvPr>
@@ -2902,9 +2903,9 @@
             </a:lvl1pPr>
           </a:lstStyle>
           <a:p>
-            <a:fld id="{DD31E337-A1DE-437B-B86D-AF21ED8D6D10}" type="datetimeFigureOut">
+            <a:fld id="{EFDDD49D-8704-42EA-801F-5E12FBDC4E8B}" type="datetimeFigureOut">
               <a:rPr lang="de-DE" smtClean="0"/>
-              <a:t>09.10.2026</a:t>
+              <a:t>10.10.2026</a:t>
             </a:fld>
             <a:endParaRPr lang="de-DE"/>
           </a:p>
@@ -2915,7 +2916,7 @@
           <p:cNvPr id="5" name="Fußzeilenplatzhalter 4">
             <a:extLst>
               <a:ext uri="{FF2B5EF4-FFF2-40B4-BE49-F238E27FC236}">
-                <a16:creationId xmlns:a16="http://schemas.microsoft.com/office/drawing/2014/main" id="{063B016C-F81C-76BD-045D-463E9FC0F5CC}"/>
+                <a16:creationId xmlns:a16="http://schemas.microsoft.com/office/drawing/2014/main" id="{CF82D8E8-5DE0-C5F0-B4A6-D6A86694FBE3}"/>
               </a:ext>
             </a:extLst>
           </p:cNvPr>
@@ -2958,7 +2959,7 @@
           <p:cNvPr id="6" name="Foliennummernplatzhalter 5">
             <a:extLst>
               <a:ext uri="{FF2B5EF4-FFF2-40B4-BE49-F238E27FC236}">
-                <a16:creationId xmlns:a16="http://schemas.microsoft.com/office/drawing/2014/main" id="{E67AF0E6-3147-DE12-F7BA-5577DC5124B4}"/>
+                <a16:creationId xmlns:a16="http://schemas.microsoft.com/office/drawing/2014/main" id="{D10EA605-0113-544C-E434-47EFC1CDD976}"/>
               </a:ext>
             </a:extLst>
           </p:cNvPr>
@@ -2992,7 +2993,7 @@
             </a:lvl1pPr>
           </a:lstStyle>
           <a:p>
-            <a:fld id="{44DD1593-1C71-4D52-B718-A1B7789A5E47}" type="slidenum">
+            <a:fld id="{5AA1CA3D-82A0-40EC-A914-BCBFDAD48921}" type="slidenum">
               <a:rPr lang="de-DE" smtClean="0"/>
               <a:t>‹Nr.›</a:t>
             </a:fld>
@@ -3003,7 +3004,7 @@
     </p:spTree>
     <p:extLst>
       <p:ext uri="{BB962C8B-B14F-4D97-AF65-F5344CB8AC3E}">
-        <p14:creationId xmlns:p14="http://schemas.microsoft.com/office/powerpoint/2010/main" val="1048284769"/>
+        <p14:creationId xmlns:p14="http://schemas.microsoft.com/office/powerpoint/2010/main" val="3515482605"/>
       </p:ext>
     </p:extLst>
   </p:cSld>
@@ -3326,7 +3327,7 @@
           <p:cNvPr id="3" name="Grafik 2">
             <a:extLst>
               <a:ext uri="{FF2B5EF4-FFF2-40B4-BE49-F238E27FC236}">
-                <a16:creationId xmlns:a16="http://schemas.microsoft.com/office/drawing/2014/main" id="{1E1CC29E-87BB-4C85-AFDA-495581B0342F}"/>
+                <a16:creationId xmlns:a16="http://schemas.microsoft.com/office/drawing/2014/main" id="{1C562BF3-F7FE-1029-872F-295771F337B3}"/>
               </a:ext>
             </a:extLst>
           </p:cNvPr>
@@ -3362,7 +3363,7 @@
           <p:cNvPr id="5" name="Grafik 4">
             <a:extLst>
               <a:ext uri="{FF2B5EF4-FFF2-40B4-BE49-F238E27FC236}">
-                <a16:creationId xmlns:a16="http://schemas.microsoft.com/office/drawing/2014/main" id="{3B8EA5AF-14C7-31D9-ACB2-ED5554F4C0CA}"/>
+                <a16:creationId xmlns:a16="http://schemas.microsoft.com/office/drawing/2014/main" id="{F8A1516A-9677-CA69-1DB5-65CC361EFD55}"/>
               </a:ext>
             </a:extLst>
           </p:cNvPr>
@@ -3398,7 +3399,7 @@
           <p:cNvPr id="7" name="Grafik 6">
             <a:extLst>
               <a:ext uri="{FF2B5EF4-FFF2-40B4-BE49-F238E27FC236}">
-                <a16:creationId xmlns:a16="http://schemas.microsoft.com/office/drawing/2014/main" id="{D44CFAD0-A382-1399-C3EF-1F7C5ED97313}"/>
+                <a16:creationId xmlns:a16="http://schemas.microsoft.com/office/drawing/2014/main" id="{3115DE59-0096-D321-9C6E-73CA5AA5B312}"/>
               </a:ext>
             </a:extLst>
           </p:cNvPr>
@@ -3434,7 +3435,7 @@
           <p:cNvPr id="9" name="Grafik 8">
             <a:extLst>
               <a:ext uri="{FF2B5EF4-FFF2-40B4-BE49-F238E27FC236}">
-                <a16:creationId xmlns:a16="http://schemas.microsoft.com/office/drawing/2014/main" id="{002CF7EE-9E6B-12FF-637E-6F70B4DA443A}"/>
+                <a16:creationId xmlns:a16="http://schemas.microsoft.com/office/drawing/2014/main" id="{56E9BED6-530C-047D-80B5-5D6E2C9D24FE}"/>
               </a:ext>
             </a:extLst>
           </p:cNvPr>
@@ -3470,7 +3471,7 @@
           <p:cNvPr id="11" name="Grafik 10">
             <a:extLst>
               <a:ext uri="{FF2B5EF4-FFF2-40B4-BE49-F238E27FC236}">
-                <a16:creationId xmlns:a16="http://schemas.microsoft.com/office/drawing/2014/main" id="{CAC96986-E34E-55D3-EF68-07D5F3A4E292}"/>
+                <a16:creationId xmlns:a16="http://schemas.microsoft.com/office/drawing/2014/main" id="{011E56CB-0B7B-50A3-6614-61E511F34434}"/>
               </a:ext>
             </a:extLst>
           </p:cNvPr>
@@ -3506,7 +3507,7 @@
           <p:cNvPr id="13" name="Grafik 12">
             <a:extLst>
               <a:ext uri="{FF2B5EF4-FFF2-40B4-BE49-F238E27FC236}">
-                <a16:creationId xmlns:a16="http://schemas.microsoft.com/office/drawing/2014/main" id="{EA8087B9-6CD9-691F-63FD-9C76689D5469}"/>
+                <a16:creationId xmlns:a16="http://schemas.microsoft.com/office/drawing/2014/main" id="{3579E8CA-433C-6CD0-2524-9189C6290580}"/>
               </a:ext>
             </a:extLst>
           </p:cNvPr>
@@ -3542,7 +3543,7 @@
           <p:cNvPr id="15" name="Grafik 14">
             <a:extLst>
               <a:ext uri="{FF2B5EF4-FFF2-40B4-BE49-F238E27FC236}">
-                <a16:creationId xmlns:a16="http://schemas.microsoft.com/office/drawing/2014/main" id="{9F5EE2E7-6711-7F96-71F8-1ACEFA3F3776}"/>
+                <a16:creationId xmlns:a16="http://schemas.microsoft.com/office/drawing/2014/main" id="{E35B5F87-915A-62E0-4728-62B55888C970}"/>
               </a:ext>
             </a:extLst>
           </p:cNvPr>
@@ -3578,7 +3579,7 @@
           <p:cNvPr id="17" name="Grafik 16">
             <a:extLst>
               <a:ext uri="{FF2B5EF4-FFF2-40B4-BE49-F238E27FC236}">
-                <a16:creationId xmlns:a16="http://schemas.microsoft.com/office/drawing/2014/main" id="{FF365356-B800-D73F-9C3D-A25237157899}"/>
+                <a16:creationId xmlns:a16="http://schemas.microsoft.com/office/drawing/2014/main" id="{30ED780B-1BD4-2669-0F2B-51914E795331}"/>
               </a:ext>
             </a:extLst>
           </p:cNvPr>
@@ -3614,7 +3615,7 @@
           <p:cNvPr id="19" name="Grafik 18">
             <a:extLst>
               <a:ext uri="{FF2B5EF4-FFF2-40B4-BE49-F238E27FC236}">
-                <a16:creationId xmlns:a16="http://schemas.microsoft.com/office/drawing/2014/main" id="{78828CD7-F5CF-B847-F617-616512A2942A}"/>
+                <a16:creationId xmlns:a16="http://schemas.microsoft.com/office/drawing/2014/main" id="{0CEA2325-B63A-6415-D765-1049E09C054A}"/>
               </a:ext>
             </a:extLst>
           </p:cNvPr>
@@ -3648,7 +3649,397 @@
     </p:spTree>
     <p:extLst>
       <p:ext uri="{BB962C8B-B14F-4D97-AF65-F5344CB8AC3E}">
-        <p14:creationId xmlns:p14="http://schemas.microsoft.com/office/powerpoint/2010/main" val="1543401764"/>
+        <p14:creationId xmlns:p14="http://schemas.microsoft.com/office/powerpoint/2010/main" val="826669420"/>
+      </p:ext>
+    </p:extLst>
+  </p:cSld>
+  <p:clrMapOvr>
+    <a:masterClrMapping/>
+  </p:clrMapOvr>
+</p:sld>
+</file>
+
+<file path=ppt/slides/slide2.xml><?xml version="1.0" encoding="utf-8"?>
+<p:sld xmlns:a="http://schemas.openxmlformats.org/drawingml/2006/main" xmlns:r="http://schemas.openxmlformats.org/officeDocument/2006/relationships" xmlns:p="http://schemas.openxmlformats.org/presentationml/2006/main">
+  <p:cSld>
+    <p:spTree>
+      <p:nvGrpSpPr>
+        <p:cNvPr id="1" name=""/>
+        <p:cNvGrpSpPr/>
+        <p:nvPr/>
+      </p:nvGrpSpPr>
+      <p:grpSpPr>
+        <a:xfrm>
+          <a:off x="0" y="0"/>
+          <a:ext cx="0" cy="0"/>
+          <a:chOff x="0" y="0"/>
+          <a:chExt cx="0" cy="0"/>
+        </a:xfrm>
+      </p:grpSpPr>
+      <p:pic>
+        <p:nvPicPr>
+          <p:cNvPr id="3" name="Grafik 2">
+            <a:extLst>
+              <a:ext uri="{FF2B5EF4-FFF2-40B4-BE49-F238E27FC236}">
+                <a16:creationId xmlns:a16="http://schemas.microsoft.com/office/drawing/2014/main" id="{173FC683-98EB-C6D0-5A7A-A2DAA138664D}"/>
+              </a:ext>
+            </a:extLst>
+          </p:cNvPr>
+          <p:cNvPicPr>
+            <a:picLocks/>
+          </p:cNvPicPr>
+          <p:nvPr/>
+        </p:nvPicPr>
+        <p:blipFill>
+          <a:blip r:embed="rId2">
+            <a:extLst>
+              <a:ext uri="{28A0092B-C50C-407E-A947-70E740481C1C}">
+                <a14:useLocalDpi xmlns:a14="http://schemas.microsoft.com/office/drawing/2010/main" val="0"/>
+              </a:ext>
+            </a:extLst>
+          </a:blip>
+          <a:stretch>
+            <a:fillRect/>
+          </a:stretch>
+        </p:blipFill>
+        <p:spPr>
+          <a:xfrm>
+            <a:off x="190500" y="762000"/>
+            <a:ext cx="2260600" cy="1695450"/>
+          </a:xfrm>
+          <a:prstGeom prst="rect">
+            <a:avLst/>
+          </a:prstGeom>
+        </p:spPr>
+      </p:pic>
+      <p:pic>
+        <p:nvPicPr>
+          <p:cNvPr id="5" name="Grafik 4">
+            <a:extLst>
+              <a:ext uri="{FF2B5EF4-FFF2-40B4-BE49-F238E27FC236}">
+                <a16:creationId xmlns:a16="http://schemas.microsoft.com/office/drawing/2014/main" id="{DB43C767-147C-2757-7EE8-7ABEE6C2F79A}"/>
+              </a:ext>
+            </a:extLst>
+          </p:cNvPr>
+          <p:cNvPicPr>
+            <a:picLocks/>
+          </p:cNvPicPr>
+          <p:nvPr/>
+        </p:nvPicPr>
+        <p:blipFill>
+          <a:blip r:embed="rId3">
+            <a:extLst>
+              <a:ext uri="{28A0092B-C50C-407E-A947-70E740481C1C}">
+                <a14:useLocalDpi xmlns:a14="http://schemas.microsoft.com/office/drawing/2010/main" val="0"/>
+              </a:ext>
+            </a:extLst>
+          </a:blip>
+          <a:stretch>
+            <a:fillRect/>
+          </a:stretch>
+        </p:blipFill>
+        <p:spPr>
+          <a:xfrm>
+            <a:off x="2578100" y="762000"/>
+            <a:ext cx="2260600" cy="1695450"/>
+          </a:xfrm>
+          <a:prstGeom prst="rect">
+            <a:avLst/>
+          </a:prstGeom>
+        </p:spPr>
+      </p:pic>
+      <p:pic>
+        <p:nvPicPr>
+          <p:cNvPr id="7" name="Grafik 6">
+            <a:extLst>
+              <a:ext uri="{FF2B5EF4-FFF2-40B4-BE49-F238E27FC236}">
+                <a16:creationId xmlns:a16="http://schemas.microsoft.com/office/drawing/2014/main" id="{50314B76-40D1-0BD8-C239-1BCA45BA9389}"/>
+              </a:ext>
+            </a:extLst>
+          </p:cNvPr>
+          <p:cNvPicPr>
+            <a:picLocks/>
+          </p:cNvPicPr>
+          <p:nvPr/>
+        </p:nvPicPr>
+        <p:blipFill>
+          <a:blip r:embed="rId4">
+            <a:extLst>
+              <a:ext uri="{28A0092B-C50C-407E-A947-70E740481C1C}">
+                <a14:useLocalDpi xmlns:a14="http://schemas.microsoft.com/office/drawing/2010/main" val="0"/>
+              </a:ext>
+            </a:extLst>
+          </a:blip>
+          <a:stretch>
+            <a:fillRect/>
+          </a:stretch>
+        </p:blipFill>
+        <p:spPr>
+          <a:xfrm>
+            <a:off x="4965700" y="762000"/>
+            <a:ext cx="2260600" cy="1695450"/>
+          </a:xfrm>
+          <a:prstGeom prst="rect">
+            <a:avLst/>
+          </a:prstGeom>
+        </p:spPr>
+      </p:pic>
+      <p:pic>
+        <p:nvPicPr>
+          <p:cNvPr id="9" name="Grafik 8">
+            <a:extLst>
+              <a:ext uri="{FF2B5EF4-FFF2-40B4-BE49-F238E27FC236}">
+                <a16:creationId xmlns:a16="http://schemas.microsoft.com/office/drawing/2014/main" id="{F466ED38-DBDD-69BE-2B81-DE58CA7CD08B}"/>
+              </a:ext>
+            </a:extLst>
+          </p:cNvPr>
+          <p:cNvPicPr>
+            <a:picLocks/>
+          </p:cNvPicPr>
+          <p:nvPr/>
+        </p:nvPicPr>
+        <p:blipFill>
+          <a:blip r:embed="rId5">
+            <a:extLst>
+              <a:ext uri="{28A0092B-C50C-407E-A947-70E740481C1C}">
+                <a14:useLocalDpi xmlns:a14="http://schemas.microsoft.com/office/drawing/2010/main" val="0"/>
+              </a:ext>
+            </a:extLst>
+          </a:blip>
+          <a:stretch>
+            <a:fillRect/>
+          </a:stretch>
+        </p:blipFill>
+        <p:spPr>
+          <a:xfrm>
+            <a:off x="7353300" y="762000"/>
+            <a:ext cx="2260600" cy="1695450"/>
+          </a:xfrm>
+          <a:prstGeom prst="rect">
+            <a:avLst/>
+          </a:prstGeom>
+        </p:spPr>
+      </p:pic>
+      <p:pic>
+        <p:nvPicPr>
+          <p:cNvPr id="11" name="Grafik 10">
+            <a:extLst>
+              <a:ext uri="{FF2B5EF4-FFF2-40B4-BE49-F238E27FC236}">
+                <a16:creationId xmlns:a16="http://schemas.microsoft.com/office/drawing/2014/main" id="{A7FE17AC-7768-0C7A-A168-8EB22A086A42}"/>
+              </a:ext>
+            </a:extLst>
+          </p:cNvPr>
+          <p:cNvPicPr>
+            <a:picLocks/>
+          </p:cNvPicPr>
+          <p:nvPr/>
+        </p:nvPicPr>
+        <p:blipFill>
+          <a:blip r:embed="rId6">
+            <a:extLst>
+              <a:ext uri="{28A0092B-C50C-407E-A947-70E740481C1C}">
+                <a14:useLocalDpi xmlns:a14="http://schemas.microsoft.com/office/drawing/2010/main" val="0"/>
+              </a:ext>
+            </a:extLst>
+          </a:blip>
+          <a:stretch>
+            <a:fillRect/>
+          </a:stretch>
+        </p:blipFill>
+        <p:spPr>
+          <a:xfrm>
+            <a:off x="9740900" y="762000"/>
+            <a:ext cx="2260600" cy="1695450"/>
+          </a:xfrm>
+          <a:prstGeom prst="rect">
+            <a:avLst/>
+          </a:prstGeom>
+        </p:spPr>
+      </p:pic>
+      <p:pic>
+        <p:nvPicPr>
+          <p:cNvPr id="13" name="Grafik 12">
+            <a:extLst>
+              <a:ext uri="{FF2B5EF4-FFF2-40B4-BE49-F238E27FC236}">
+                <a16:creationId xmlns:a16="http://schemas.microsoft.com/office/drawing/2014/main" id="{6D2FF15E-9F9C-6D11-D7BF-3F836FB9A56E}"/>
+              </a:ext>
+            </a:extLst>
+          </p:cNvPr>
+          <p:cNvPicPr>
+            <a:picLocks/>
+          </p:cNvPicPr>
+          <p:nvPr/>
+        </p:nvPicPr>
+        <p:blipFill>
+          <a:blip r:embed="rId7">
+            <a:extLst>
+              <a:ext uri="{28A0092B-C50C-407E-A947-70E740481C1C}">
+                <a14:useLocalDpi xmlns:a14="http://schemas.microsoft.com/office/drawing/2010/main" val="0"/>
+              </a:ext>
+            </a:extLst>
+          </a:blip>
+          <a:stretch>
+            <a:fillRect/>
+          </a:stretch>
+        </p:blipFill>
+        <p:spPr>
+          <a:xfrm>
+            <a:off x="190500" y="3683000"/>
+            <a:ext cx="2260600" cy="1695450"/>
+          </a:xfrm>
+          <a:prstGeom prst="rect">
+            <a:avLst/>
+          </a:prstGeom>
+        </p:spPr>
+      </p:pic>
+      <p:pic>
+        <p:nvPicPr>
+          <p:cNvPr id="15" name="Grafik 14">
+            <a:extLst>
+              <a:ext uri="{FF2B5EF4-FFF2-40B4-BE49-F238E27FC236}">
+                <a16:creationId xmlns:a16="http://schemas.microsoft.com/office/drawing/2014/main" id="{E0AF9E65-410B-5ED5-A29B-A05339B88C7F}"/>
+              </a:ext>
+            </a:extLst>
+          </p:cNvPr>
+          <p:cNvPicPr>
+            <a:picLocks/>
+          </p:cNvPicPr>
+          <p:nvPr/>
+        </p:nvPicPr>
+        <p:blipFill>
+          <a:blip r:embed="rId8">
+            <a:extLst>
+              <a:ext uri="{28A0092B-C50C-407E-A947-70E740481C1C}">
+                <a14:useLocalDpi xmlns:a14="http://schemas.microsoft.com/office/drawing/2010/main" val="0"/>
+              </a:ext>
+            </a:extLst>
+          </a:blip>
+          <a:stretch>
+            <a:fillRect/>
+          </a:stretch>
+        </p:blipFill>
+        <p:spPr>
+          <a:xfrm>
+            <a:off x="2578100" y="3683000"/>
+            <a:ext cx="2260600" cy="1695450"/>
+          </a:xfrm>
+          <a:prstGeom prst="rect">
+            <a:avLst/>
+          </a:prstGeom>
+        </p:spPr>
+      </p:pic>
+      <p:pic>
+        <p:nvPicPr>
+          <p:cNvPr id="17" name="Grafik 16">
+            <a:extLst>
+              <a:ext uri="{FF2B5EF4-FFF2-40B4-BE49-F238E27FC236}">
+                <a16:creationId xmlns:a16="http://schemas.microsoft.com/office/drawing/2014/main" id="{8B8BCCF7-F60A-8826-B968-AD6AEC82B5E4}"/>
+              </a:ext>
+            </a:extLst>
+          </p:cNvPr>
+          <p:cNvPicPr>
+            <a:picLocks/>
+          </p:cNvPicPr>
+          <p:nvPr/>
+        </p:nvPicPr>
+        <p:blipFill>
+          <a:blip r:embed="rId9">
+            <a:extLst>
+              <a:ext uri="{28A0092B-C50C-407E-A947-70E740481C1C}">
+                <a14:useLocalDpi xmlns:a14="http://schemas.microsoft.com/office/drawing/2010/main" val="0"/>
+              </a:ext>
+            </a:extLst>
+          </a:blip>
+          <a:stretch>
+            <a:fillRect/>
+          </a:stretch>
+        </p:blipFill>
+        <p:spPr>
+          <a:xfrm>
+            <a:off x="4965700" y="3683000"/>
+            <a:ext cx="2260600" cy="1695450"/>
+          </a:xfrm>
+          <a:prstGeom prst="rect">
+            <a:avLst/>
+          </a:prstGeom>
+        </p:spPr>
+      </p:pic>
+      <p:pic>
+        <p:nvPicPr>
+          <p:cNvPr id="19" name="Grafik 18">
+            <a:extLst>
+              <a:ext uri="{FF2B5EF4-FFF2-40B4-BE49-F238E27FC236}">
+                <a16:creationId xmlns:a16="http://schemas.microsoft.com/office/drawing/2014/main" id="{EAED44B7-B62D-13C9-00D6-6F4109B91040}"/>
+              </a:ext>
+            </a:extLst>
+          </p:cNvPr>
+          <p:cNvPicPr>
+            <a:picLocks/>
+          </p:cNvPicPr>
+          <p:nvPr/>
+        </p:nvPicPr>
+        <p:blipFill>
+          <a:blip r:embed="rId10">
+            <a:extLst>
+              <a:ext uri="{28A0092B-C50C-407E-A947-70E740481C1C}">
+                <a14:useLocalDpi xmlns:a14="http://schemas.microsoft.com/office/drawing/2010/main" val="0"/>
+              </a:ext>
+            </a:extLst>
+          </a:blip>
+          <a:stretch>
+            <a:fillRect/>
+          </a:stretch>
+        </p:blipFill>
+        <p:spPr>
+          <a:xfrm>
+            <a:off x="7353300" y="3683000"/>
+            <a:ext cx="2260600" cy="1695450"/>
+          </a:xfrm>
+          <a:prstGeom prst="rect">
+            <a:avLst/>
+          </a:prstGeom>
+        </p:spPr>
+      </p:pic>
+      <p:pic>
+        <p:nvPicPr>
+          <p:cNvPr id="21" name="Grafik 20">
+            <a:extLst>
+              <a:ext uri="{FF2B5EF4-FFF2-40B4-BE49-F238E27FC236}">
+                <a16:creationId xmlns:a16="http://schemas.microsoft.com/office/drawing/2014/main" id="{209EBCFA-47D8-1B97-3419-390601D2C34D}"/>
+              </a:ext>
+            </a:extLst>
+          </p:cNvPr>
+          <p:cNvPicPr>
+            <a:picLocks/>
+          </p:cNvPicPr>
+          <p:nvPr/>
+        </p:nvPicPr>
+        <p:blipFill>
+          <a:blip r:embed="rId11">
+            <a:extLst>
+              <a:ext uri="{28A0092B-C50C-407E-A947-70E740481C1C}">
+                <a14:useLocalDpi xmlns:a14="http://schemas.microsoft.com/office/drawing/2010/main" val="0"/>
+              </a:ext>
+            </a:extLst>
+          </a:blip>
+          <a:stretch>
+            <a:fillRect/>
+          </a:stretch>
+        </p:blipFill>
+        <p:spPr>
+          <a:xfrm>
+            <a:off x="9740900" y="3683000"/>
+            <a:ext cx="2260600" cy="1695450"/>
+          </a:xfrm>
+          <a:prstGeom prst="rect">
+            <a:avLst/>
+          </a:prstGeom>
+        </p:spPr>
+      </p:pic>
+    </p:spTree>
+    <p:extLst>
+      <p:ext uri="{BB962C8B-B14F-4D97-AF65-F5344CB8AC3E}">
+        <p14:creationId xmlns:p14="http://schemas.microsoft.com/office/powerpoint/2010/main" val="2787232214"/>
       </p:ext>
     </p:extLst>
   </p:cSld>
